--- a/01-调研规划/鸿蒙之城数智突击队.pptx
+++ b/01-调研规划/鸿蒙之城数智突击队.pptx
@@ -3633,7 +3633,7 @@
         </p:nvGraphicFramePr>
         <p:xfrm>
           <a:off x="838200" y="1825625"/>
-          <a:ext cx="10648950" cy="3679190"/>
+          <a:ext cx="10699750" cy="4293235"/>
         </p:xfrm>
         <a:graphic>
           <a:graphicData uri="http://schemas.openxmlformats.org/drawingml/2006/table">
@@ -3642,14 +3642,14 @@
                 <a:tableStyleId>{5C22544A-7EE6-4342-B048-85BDC9FD1C3A}</a:tableStyleId>
               </a:tblPr>
               <a:tblGrid>
-                <a:gridCol w="1774825"/>
-                <a:gridCol w="1614170"/>
-                <a:gridCol w="1935480"/>
-                <a:gridCol w="1774825"/>
-                <a:gridCol w="1774825"/>
-                <a:gridCol w="1774825"/>
+                <a:gridCol w="1783080"/>
+                <a:gridCol w="1621790"/>
+                <a:gridCol w="1945005"/>
+                <a:gridCol w="1783080"/>
+                <a:gridCol w="1783715"/>
+                <a:gridCol w="1783080"/>
               </a:tblGrid>
-              <a:tr h="615315">
+              <a:tr h="718185">
                 <a:tc>
                   <a:txBody>
                     <a:bodyPr/>
@@ -3657,7 +3657,7 @@
                       <a:pPr>
                         <a:buNone/>
                       </a:pPr>
-                      <a:endParaRPr lang="en-US" altLang="zh-CN" sz="1800"/>
+                      <a:endParaRPr lang="en-US" altLang="zh-CN" sz="1600"/>
                     </a:p>
                   </a:txBody>
                   <a:tcPr/>
@@ -3670,14 +3670,14 @@
                         <a:buNone/>
                       </a:pPr>
                       <a:r>
-                        <a:rPr lang="en-US" altLang="zh-CN" sz="1800"/>
+                        <a:rPr lang="en-US" altLang="zh-CN" sz="1600"/>
                         <a:t>27</a:t>
                       </a:r>
                       <a:r>
-                        <a:rPr lang="zh-CN" altLang="en-US" sz="1800"/>
+                        <a:rPr lang="zh-CN" altLang="en-US" sz="1600"/>
                         <a:t>号（周一）</a:t>
                       </a:r>
-                      <a:endParaRPr lang="zh-CN" altLang="en-US" sz="1800"/>
+                      <a:endParaRPr lang="zh-CN" altLang="en-US" sz="1600"/>
                     </a:p>
                   </a:txBody>
                   <a:tcPr/>
@@ -3690,14 +3690,14 @@
                         <a:buNone/>
                       </a:pPr>
                       <a:r>
-                        <a:rPr lang="en-US" altLang="zh-CN" sz="1800"/>
+                        <a:rPr lang="en-US" altLang="zh-CN" sz="1600"/>
                         <a:t>28</a:t>
                       </a:r>
                       <a:r>
-                        <a:rPr lang="zh-CN" altLang="en-US" sz="1800"/>
+                        <a:rPr lang="zh-CN" altLang="en-US" sz="1600"/>
                         <a:t>号（周二）</a:t>
                       </a:r>
-                      <a:endParaRPr lang="zh-CN" altLang="en-US" sz="1800"/>
+                      <a:endParaRPr lang="zh-CN" altLang="en-US" sz="1600"/>
                     </a:p>
                   </a:txBody>
                   <a:tcPr/>
@@ -3710,14 +3710,14 @@
                         <a:buNone/>
                       </a:pPr>
                       <a:r>
-                        <a:rPr lang="en-US" altLang="zh-CN" sz="1800"/>
+                        <a:rPr lang="en-US" altLang="zh-CN" sz="1600"/>
                         <a:t>29</a:t>
                       </a:r>
                       <a:r>
-                        <a:rPr lang="zh-CN" altLang="en-US" sz="1800"/>
+                        <a:rPr lang="zh-CN" altLang="en-US" sz="1600"/>
                         <a:t>号（周三）</a:t>
                       </a:r>
-                      <a:endParaRPr lang="zh-CN" altLang="en-US" sz="1800"/>
+                      <a:endParaRPr lang="zh-CN" altLang="en-US" sz="1600"/>
                     </a:p>
                   </a:txBody>
                   <a:tcPr/>
@@ -3730,14 +3730,14 @@
                         <a:buNone/>
                       </a:pPr>
                       <a:r>
-                        <a:rPr lang="en-US" altLang="zh-CN" sz="1800"/>
+                        <a:rPr lang="en-US" altLang="zh-CN" sz="1600"/>
                         <a:t>30</a:t>
                       </a:r>
                       <a:r>
-                        <a:rPr lang="zh-CN" altLang="en-US" sz="1800"/>
+                        <a:rPr lang="zh-CN" altLang="en-US" sz="1600"/>
                         <a:t>号（周四）</a:t>
                       </a:r>
-                      <a:endParaRPr lang="zh-CN" altLang="en-US" sz="1800"/>
+                      <a:endParaRPr lang="zh-CN" altLang="en-US" sz="1600"/>
                     </a:p>
                   </a:txBody>
                   <a:tcPr/>
@@ -3750,20 +3750,20 @@
                         <a:buNone/>
                       </a:pPr>
                       <a:r>
-                        <a:rPr lang="en-US" altLang="zh-CN" sz="1800"/>
+                        <a:rPr lang="en-US" altLang="zh-CN" sz="1600"/>
                         <a:t>31</a:t>
                       </a:r>
                       <a:r>
-                        <a:rPr lang="zh-CN" altLang="en-US" sz="1800"/>
+                        <a:rPr lang="zh-CN" altLang="en-US" sz="1600"/>
                         <a:t>号（周五）</a:t>
                       </a:r>
-                      <a:endParaRPr lang="zh-CN" altLang="en-US" sz="1800"/>
+                      <a:endParaRPr lang="zh-CN" altLang="en-US" sz="1600"/>
                     </a:p>
                   </a:txBody>
                   <a:tcPr/>
                 </a:tc>
               </a:tr>
-              <a:tr h="836295">
+              <a:tr h="975995">
                 <a:tc>
                   <a:txBody>
                     <a:bodyPr/>
@@ -3772,10 +3772,10 @@
                         <a:buNone/>
                       </a:pPr>
                       <a:r>
-                        <a:rPr lang="zh-CN" altLang="en-US" sz="1800"/>
+                        <a:rPr lang="zh-CN" altLang="en-US" sz="1600"/>
                         <a:t>上午</a:t>
                       </a:r>
-                      <a:endParaRPr lang="zh-CN" altLang="en-US" sz="1800"/>
+                      <a:endParaRPr lang="zh-CN" altLang="en-US" sz="1600"/>
                     </a:p>
                   </a:txBody>
                   <a:tcPr/>
@@ -3788,10 +3788,10 @@
                         <a:buNone/>
                       </a:pPr>
                       <a:r>
-                        <a:rPr lang="zh-CN" altLang="en-US" sz="1800"/>
+                        <a:rPr lang="zh-CN" altLang="en-US" sz="1600"/>
                         <a:t>准备工作</a:t>
                       </a:r>
-                      <a:endParaRPr lang="zh-CN" altLang="en-US" sz="1800"/>
+                      <a:endParaRPr lang="zh-CN" altLang="en-US" sz="1600"/>
                     </a:p>
                   </a:txBody>
                   <a:tcPr/>
@@ -3804,28 +3804,28 @@
                         <a:buNone/>
                       </a:pPr>
                       <a:r>
-                        <a:rPr lang="zh-CN" altLang="en-US" sz="1800"/>
+                        <a:rPr lang="zh-CN" altLang="en-US" sz="1600"/>
                         <a:t>市政局筹备会</a:t>
                       </a:r>
-                      <a:endParaRPr lang="zh-CN" altLang="en-US" sz="1800"/>
+                      <a:endParaRPr lang="zh-CN" altLang="en-US" sz="1600"/>
                     </a:p>
                     <a:p>
                       <a:pPr>
                         <a:buNone/>
                       </a:pPr>
                       <a:r>
-                        <a:rPr lang="zh-CN" altLang="en-US" sz="1800"/>
+                        <a:rPr lang="zh-CN" altLang="en-US" sz="1600"/>
                         <a:t>上午</a:t>
                       </a:r>
                       <a:r>
-                        <a:rPr lang="en-US" altLang="zh-CN" sz="1800"/>
+                        <a:rPr lang="en-US" altLang="zh-CN" sz="1600"/>
                         <a:t>10</a:t>
                       </a:r>
                       <a:r>
-                        <a:rPr lang="zh-CN" altLang="en-US" sz="1800"/>
+                        <a:rPr lang="zh-CN" altLang="en-US" sz="1600"/>
                         <a:t>点</a:t>
                       </a:r>
-                      <a:endParaRPr lang="zh-CN" altLang="en-US" sz="1800"/>
+                      <a:endParaRPr lang="zh-CN" altLang="en-US" sz="1600"/>
                     </a:p>
                   </a:txBody>
                   <a:tcPr>
@@ -3842,36 +3842,36 @@
                         <a:buNone/>
                       </a:pPr>
                       <a:r>
-                        <a:rPr lang="en-US" altLang="zh-CN" sz="1800"/>
+                        <a:rPr lang="en-US" altLang="zh-CN" sz="1600"/>
                         <a:t>1</a:t>
                       </a:r>
                       <a:r>
-                        <a:rPr lang="zh-CN" altLang="en-US" sz="1800"/>
+                        <a:rPr lang="zh-CN" altLang="en-US" sz="1600"/>
                         <a:t>、东莞市展览馆</a:t>
                       </a:r>
                       <a:r>
-                        <a:rPr lang="en-US" altLang="zh-CN" sz="1800"/>
+                        <a:rPr lang="en-US" altLang="zh-CN" sz="1600"/>
                         <a:t>(9:30)</a:t>
                       </a:r>
-                      <a:endParaRPr lang="en-US" altLang="zh-CN" sz="1800"/>
+                      <a:endParaRPr lang="en-US" altLang="zh-CN" sz="1600"/>
                     </a:p>
                     <a:p>
                       <a:pPr>
                         <a:buNone/>
                       </a:pPr>
                       <a:r>
-                        <a:rPr lang="en-US" altLang="zh-CN" sz="1800"/>
+                        <a:rPr lang="en-US" altLang="zh-CN" sz="1600"/>
                         <a:t>2</a:t>
                       </a:r>
                       <a:r>
-                        <a:rPr lang="zh-CN" altLang="en-US" sz="1800"/>
+                        <a:rPr lang="zh-CN" altLang="en-US" sz="1600"/>
                         <a:t>、市政数局</a:t>
                       </a:r>
                       <a:r>
-                        <a:rPr lang="zh-CN" altLang="en-US" sz="1800"/>
+                        <a:rPr lang="zh-CN" altLang="en-US" sz="1600"/>
                         <a:t>彩排</a:t>
                       </a:r>
-                      <a:endParaRPr lang="zh-CN" altLang="en-US" sz="1800"/>
+                      <a:endParaRPr lang="zh-CN" altLang="en-US" sz="1600"/>
                     </a:p>
                   </a:txBody>
                   <a:tcPr>
@@ -3888,10 +3888,181 @@
                         <a:buNone/>
                       </a:pPr>
                       <a:r>
-                        <a:rPr lang="zh-CN" altLang="en-US" sz="1800"/>
+                        <a:rPr lang="zh-CN" altLang="en-US" sz="1600">
+                          <a:sym typeface="+mn-ea"/>
+                        </a:rPr>
                         <a:t>市政局的会（松山湖）</a:t>
                       </a:r>
-                      <a:endParaRPr lang="zh-CN" altLang="en-US" sz="1800"/>
+                      <a:endParaRPr lang="zh-CN" altLang="en-US" sz="1600"/>
+                    </a:p>
+                  </a:txBody>
+                  <a:tcPr>
+                    <a:solidFill>
+                      <a:schemeClr val="accent1">
+                        <a:lumMod val="40000"/>
+                        <a:lumOff val="60000"/>
+                      </a:schemeClr>
+                    </a:solidFill>
+                  </a:tcPr>
+                </a:tc>
+                <a:tc>
+                  <a:txBody>
+                    <a:bodyPr/>
+                    <a:p>
+                      <a:pPr>
+                        <a:buNone/>
+                      </a:pPr>
+                      <a:r>
+                        <a:rPr lang="zh-CN" altLang="en-US" sz="1600"/>
+                        <a:t>市民服务中心</a:t>
+                      </a:r>
+                      <a:endParaRPr lang="zh-CN" altLang="en-US" sz="1600"/>
+                    </a:p>
+                  </a:txBody>
+                  <a:tcPr>
+                    <a:solidFill>
+                      <a:schemeClr val="accent3"/>
+                    </a:solidFill>
+                  </a:tcPr>
+                </a:tc>
+              </a:tr>
+              <a:tr h="1623060">
+                <a:tc>
+                  <a:txBody>
+                    <a:bodyPr/>
+                    <a:p>
+                      <a:pPr>
+                        <a:buNone/>
+                      </a:pPr>
+                      <a:r>
+                        <a:rPr lang="zh-CN" altLang="en-US" sz="1600"/>
+                        <a:t>下午</a:t>
+                      </a:r>
+                      <a:endParaRPr lang="zh-CN" altLang="en-US" sz="1600"/>
+                    </a:p>
+                  </a:txBody>
+                  <a:tcPr/>
+                </a:tc>
+                <a:tc>
+                  <a:txBody>
+                    <a:bodyPr/>
+                    <a:p>
+                      <a:pPr>
+                        <a:buNone/>
+                      </a:pPr>
+                      <a:r>
+                        <a:rPr lang="zh-CN" altLang="en-US" sz="1600"/>
+                        <a:t>同书记开展实践见面会</a:t>
+                      </a:r>
+                      <a:endParaRPr lang="zh-CN" altLang="en-US" sz="1600"/>
+                    </a:p>
+                  </a:txBody>
+                  <a:tcPr/>
+                </a:tc>
+                <a:tc>
+                  <a:txBody>
+                    <a:bodyPr/>
+                    <a:p>
+                      <a:pPr>
+                        <a:buNone/>
+                      </a:pPr>
+                      <a:r>
+                        <a:rPr lang="en-US" altLang="zh-CN" sz="1600"/>
+                        <a:t>1</a:t>
+                      </a:r>
+                      <a:r>
+                        <a:rPr lang="zh-CN" altLang="en-US" sz="1600"/>
+                        <a:t>、寮步鸿蒙智行中心</a:t>
+                      </a:r>
+                      <a:r>
+                        <a:rPr lang="en-US" altLang="zh-CN" sz="1600"/>
+                        <a:t> </a:t>
+                      </a:r>
+                      <a:endParaRPr lang="en-US" altLang="zh-CN" sz="1600"/>
+                    </a:p>
+                    <a:p>
+                      <a:pPr>
+                        <a:buNone/>
+                      </a:pPr>
+                      <a:r>
+                        <a:rPr lang="en-US" altLang="zh-CN" sz="1600"/>
+                        <a:t>2</a:t>
+                      </a:r>
+                      <a:r>
+                        <a:rPr lang="zh-CN" altLang="en-US" sz="1600"/>
+                        <a:t>、</a:t>
+                      </a:r>
+                      <a:r>
+                        <a:rPr lang="en-US" altLang="zh-CN" sz="1600"/>
+                        <a:t>R&amp;A PARK</a:t>
+                      </a:r>
+                      <a:endParaRPr lang="en-US" altLang="zh-CN" sz="1600"/>
+                    </a:p>
+                  </a:txBody>
+                  <a:tcPr/>
+                </a:tc>
+                <a:tc>
+                  <a:txBody>
+                    <a:bodyPr/>
+                    <a:p>
+                      <a:pPr>
+                        <a:buNone/>
+                      </a:pPr>
+                      <a:r>
+                        <a:rPr lang="en-US" altLang="zh-CN" sz="1600"/>
+                        <a:t>1</a:t>
+                      </a:r>
+                      <a:r>
+                        <a:rPr lang="zh-CN" altLang="en-US" sz="1600"/>
+                        <a:t>、广东省开源鸿蒙适配中心（</a:t>
+                      </a:r>
+                      <a:r>
+                        <a:rPr lang="en-US" altLang="zh-CN" sz="1600"/>
+                        <a:t>14:00-15:00)</a:t>
+                      </a:r>
+                      <a:endParaRPr lang="en-US" altLang="zh-CN" sz="1600"/>
+                    </a:p>
+                    <a:p>
+                      <a:pPr>
+                        <a:buNone/>
+                      </a:pPr>
+                      <a:endParaRPr lang="zh-CN" altLang="en-US" sz="1600"/>
+                    </a:p>
+                    <a:p>
+                      <a:pPr>
+                        <a:buNone/>
+                      </a:pPr>
+                      <a:r>
+                        <a:rPr lang="en-US" altLang="zh-CN" sz="1600"/>
+                        <a:t>2</a:t>
+                      </a:r>
+                      <a:r>
+                        <a:rPr lang="zh-CN" altLang="en-US" sz="1600"/>
+                        <a:t>、慕思睡眠公司</a:t>
+                      </a:r>
+                      <a:r>
+                        <a:rPr lang="en-US" altLang="zh-CN" sz="1600"/>
+                        <a:t>(16:00-18:00)</a:t>
+                      </a:r>
+                      <a:endParaRPr lang="en-US" altLang="zh-CN" sz="1600"/>
+                    </a:p>
+                  </a:txBody>
+                  <a:tcPr/>
+                </a:tc>
+                <a:tc>
+                  <a:txBody>
+                    <a:bodyPr/>
+                    <a:p>
+                      <a:pPr>
+                        <a:buNone/>
+                      </a:pPr>
+                      <a:r>
+                        <a:rPr lang="zh-CN" altLang="en-US" sz="1600">
+                          <a:sym typeface="+mn-ea"/>
+                        </a:rPr>
+                        <a:t>市政局的会（松山湖）</a:t>
+                      </a:r>
+                      <a:endParaRPr lang="zh-CN" altLang="en-US" sz="1600"/>
                     </a:p>
                   </a:txBody>
                   <a:tcPr>
@@ -3908,10 +4079,20 @@
                         <a:buNone/>
                       </a:pPr>
                       <a:r>
-                        <a:rPr lang="zh-CN" altLang="en-US" sz="1800"/>
-                        <a:t>市民服务中心</a:t>
-                      </a:r>
-                      <a:endParaRPr lang="zh-CN" altLang="en-US" sz="1800"/>
+                        <a:rPr lang="zh-CN" altLang="en-US" sz="1600"/>
+                        <a:t>联通公司、湾区数谷。</a:t>
+                      </a:r>
+                      <a:endParaRPr lang="zh-CN" altLang="en-US" sz="1600"/>
+                    </a:p>
+                    <a:p>
+                      <a:pPr>
+                        <a:buNone/>
+                      </a:pPr>
+                      <a:r>
+                        <a:rPr lang="zh-CN" altLang="en-US" sz="1600"/>
+                        <a:t>如有时间还能继续参访一些企业</a:t>
+                      </a:r>
+                      <a:endParaRPr lang="zh-CN" altLang="en-US" sz="1600"/>
                     </a:p>
                   </a:txBody>
                   <a:tcPr>
@@ -3921,7 +4102,7 @@
                   </a:tcPr>
                 </a:tc>
               </a:tr>
-              <a:tr h="1391285">
+              <a:tr h="975995">
                 <a:tc>
                   <a:txBody>
                     <a:bodyPr/>
@@ -3930,10 +4111,10 @@
                         <a:buNone/>
                       </a:pPr>
                       <a:r>
-                        <a:rPr lang="zh-CN" altLang="en-US" sz="1800"/>
-                        <a:t>下午</a:t>
-                      </a:r>
-                      <a:endParaRPr lang="zh-CN" altLang="en-US" sz="1800"/>
+                        <a:rPr lang="zh-CN" altLang="en-US" sz="1600"/>
+                        <a:t>晚上</a:t>
+                      </a:r>
+                      <a:endParaRPr lang="zh-CN" altLang="en-US" sz="1600"/>
                     </a:p>
                   </a:txBody>
                   <a:tcPr/>
@@ -3946,10 +4127,10 @@
                         <a:buNone/>
                       </a:pPr>
                       <a:r>
-                        <a:rPr lang="zh-CN" altLang="en-US" sz="1800"/>
-                        <a:t>同书记开展实践见面会</a:t>
-                      </a:r>
-                      <a:endParaRPr lang="zh-CN" altLang="en-US" sz="1800"/>
+                        <a:rPr lang="zh-CN" altLang="en-US" sz="1600"/>
+                        <a:t>确定后续安排和线下线上同学分工</a:t>
+                      </a:r>
+                      <a:endParaRPr lang="zh-CN" altLang="en-US" sz="1600"/>
                     </a:p>
                   </a:txBody>
                   <a:tcPr/>
@@ -3962,220 +4143,40 @@
                         <a:buNone/>
                       </a:pPr>
                       <a:r>
-                        <a:rPr lang="en-US" altLang="zh-CN" sz="1800"/>
+                        <a:rPr lang="en-US" altLang="zh-CN" sz="1600"/>
                         <a:t>1</a:t>
                       </a:r>
                       <a:r>
-                        <a:rPr lang="zh-CN" altLang="en-US" sz="1800"/>
-                        <a:t>、寮步鸿蒙智行中心</a:t>
-                      </a:r>
-                      <a:r>
-                        <a:rPr lang="en-US" altLang="zh-CN" sz="1800"/>
-                        <a:t> </a:t>
-                      </a:r>
-                      <a:endParaRPr lang="en-US" altLang="zh-CN" sz="1800"/>
+                        <a:rPr lang="zh-CN" altLang="en-US" sz="1600"/>
+                        <a:t>、鸿蒙全屋智能</a:t>
+                      </a:r>
+                      <a:endParaRPr lang="zh-CN" altLang="en-US" sz="1600"/>
                     </a:p>
                     <a:p>
                       <a:pPr>
                         <a:buNone/>
                       </a:pPr>
                       <a:r>
-                        <a:rPr lang="en-US" altLang="zh-CN" sz="1800"/>
+                        <a:rPr lang="en-US" altLang="zh-CN" sz="1600"/>
                         <a:t>2</a:t>
                       </a:r>
                       <a:r>
-                        <a:rPr lang="zh-CN" altLang="en-US" sz="1800"/>
+                        <a:rPr lang="zh-CN" altLang="en-US" sz="1600"/>
                         <a:t>、</a:t>
                       </a:r>
                       <a:r>
-                        <a:rPr lang="en-US" altLang="zh-CN" sz="1800"/>
-                        <a:t>R&amp;A PARK</a:t>
-                      </a:r>
-                      <a:endParaRPr lang="en-US" altLang="zh-CN" sz="1800"/>
-                    </a:p>
-                  </a:txBody>
-                  <a:tcPr/>
-                </a:tc>
-                <a:tc>
-                  <a:txBody>
-                    <a:bodyPr/>
-                    <a:p>
-                      <a:pPr>
-                        <a:buNone/>
-                      </a:pPr>
-                      <a:r>
-                        <a:rPr lang="en-US" altLang="zh-CN" sz="1800"/>
-                        <a:t>1</a:t>
-                      </a:r>
-                      <a:r>
-                        <a:rPr lang="zh-CN" altLang="en-US" sz="1800"/>
-                        <a:t>、广东省开源鸿蒙适配中心（</a:t>
-                      </a:r>
-                      <a:r>
-                        <a:rPr lang="en-US" altLang="zh-CN" sz="1800"/>
-                        <a:t>14:00-15:00)</a:t>
-                      </a:r>
-                      <a:endParaRPr lang="zh-CN" altLang="en-US" sz="1800"/>
-                    </a:p>
-                    <a:p>
-                      <a:pPr>
-                        <a:buNone/>
-                      </a:pPr>
-                      <a:r>
-                        <a:rPr lang="en-US" altLang="zh-CN" sz="1800"/>
-                        <a:t>2</a:t>
-                      </a:r>
-                      <a:r>
-                        <a:rPr lang="zh-CN" altLang="en-US" sz="1800"/>
-                        <a:t>、慕思睡眠公司</a:t>
-                      </a:r>
-                      <a:r>
-                        <a:rPr lang="en-US" altLang="zh-CN" sz="1800"/>
-                        <a:t>(16:00-18:00)</a:t>
-                      </a:r>
-                      <a:endParaRPr lang="en-US" altLang="zh-CN" sz="1800"/>
-                    </a:p>
-                  </a:txBody>
-                  <a:tcPr/>
-                </a:tc>
-                <a:tc>
-                  <a:txBody>
-                    <a:bodyPr/>
-                    <a:p>
-                      <a:pPr>
-                        <a:buNone/>
-                      </a:pPr>
-                      <a:r>
-                        <a:rPr lang="en-US" altLang="zh-CN" sz="1800"/>
-                        <a:t>1</a:t>
-                      </a:r>
-                      <a:r>
-                        <a:rPr lang="zh-CN" altLang="en-US" sz="1800"/>
-                        <a:t>、医疗线</a:t>
-                      </a:r>
-                      <a:r>
-                        <a:rPr lang="en-US" altLang="zh-CN" sz="1800"/>
-                        <a:t> or </a:t>
-                      </a:r>
-                      <a:r>
-                        <a:rPr lang="zh-CN" altLang="en-US" sz="1800"/>
-                        <a:t>校园线二选一</a:t>
-                      </a:r>
-                      <a:endParaRPr lang="zh-CN" altLang="en-US" sz="1800"/>
-                    </a:p>
-                  </a:txBody>
-                  <a:tcPr/>
-                </a:tc>
-                <a:tc>
-                  <a:txBody>
-                    <a:bodyPr/>
-                    <a:p>
-                      <a:pPr>
-                        <a:buNone/>
-                      </a:pPr>
-                      <a:r>
-                        <a:rPr lang="zh-CN" altLang="en-US" sz="1800"/>
-                        <a:t>联通公司、湾区数谷。</a:t>
-                      </a:r>
-                      <a:endParaRPr lang="zh-CN" altLang="en-US" sz="1800"/>
-                    </a:p>
-                    <a:p>
-                      <a:pPr>
-                        <a:buNone/>
-                      </a:pPr>
-                      <a:r>
-                        <a:rPr lang="zh-CN" altLang="en-US" sz="1800"/>
-                        <a:t>如有时间还能继续参访一些企业</a:t>
-                      </a:r>
-                      <a:endParaRPr lang="zh-CN" altLang="en-US" sz="1800"/>
-                    </a:p>
-                  </a:txBody>
-                  <a:tcPr>
-                    <a:solidFill>
-                      <a:schemeClr val="accent3"/>
-                    </a:solidFill>
-                  </a:tcPr>
-                </a:tc>
-              </a:tr>
-              <a:tr h="836295">
-                <a:tc>
-                  <a:txBody>
-                    <a:bodyPr/>
-                    <a:p>
-                      <a:pPr>
-                        <a:buNone/>
-                      </a:pPr>
-                      <a:r>
-                        <a:rPr lang="zh-CN" altLang="en-US" sz="1800"/>
-                        <a:t>晚上</a:t>
-                      </a:r>
-                      <a:endParaRPr lang="zh-CN" altLang="en-US" sz="1800"/>
-                    </a:p>
-                  </a:txBody>
-                  <a:tcPr/>
-                </a:tc>
-                <a:tc>
-                  <a:txBody>
-                    <a:bodyPr/>
-                    <a:p>
-                      <a:pPr>
-                        <a:buNone/>
-                      </a:pPr>
-                      <a:r>
-                        <a:rPr lang="zh-CN" altLang="en-US" sz="1800"/>
-                        <a:t>确定后续安排和线下线上同学分工</a:t>
-                      </a:r>
-                      <a:endParaRPr lang="zh-CN" altLang="en-US" sz="1800"/>
-                    </a:p>
-                  </a:txBody>
-                  <a:tcPr/>
-                </a:tc>
-                <a:tc>
-                  <a:txBody>
-                    <a:bodyPr/>
-                    <a:p>
-                      <a:pPr>
-                        <a:buNone/>
-                      </a:pPr>
-                      <a:r>
-                        <a:rPr lang="en-US" altLang="zh-CN" sz="1800"/>
-                        <a:t>1</a:t>
-                      </a:r>
-                      <a:r>
-                        <a:rPr lang="zh-CN" altLang="en-US" sz="1800"/>
-                        <a:t>、</a:t>
-                      </a:r>
-                      <a:r>
-                        <a:rPr lang="zh-CN" altLang="en-US" sz="1800"/>
-                        <a:t>鸿蒙全屋智能</a:t>
-                      </a:r>
-                      <a:endParaRPr lang="zh-CN" altLang="en-US" sz="1800"/>
-                    </a:p>
-                    <a:p>
-                      <a:pPr>
-                        <a:buNone/>
-                      </a:pPr>
-                      <a:r>
-                        <a:rPr lang="en-US" altLang="zh-CN" sz="1800"/>
-                        <a:t>2</a:t>
-                      </a:r>
-                      <a:r>
-                        <a:rPr lang="zh-CN" altLang="en-US" sz="1800"/>
-                        <a:t>、</a:t>
-                      </a:r>
-                      <a:r>
-                        <a:rPr lang="zh-CN" altLang="en-US" sz="1800">
+                        <a:rPr lang="zh-CN" altLang="en-US" sz="1600">
                           <a:sym typeface="+mn-ea"/>
                         </a:rPr>
                         <a:t>美宜佳</a:t>
                       </a:r>
                       <a:r>
-                        <a:rPr lang="zh-CN" altLang="en-US" sz="1800">
+                        <a:rPr lang="zh-CN" altLang="en-US" sz="1600">
                           <a:sym typeface="+mn-ea"/>
                         </a:rPr>
                         <a:t>零售店</a:t>
                       </a:r>
-                      <a:endParaRPr lang="zh-CN" altLang="en-US" sz="1800">
+                      <a:endParaRPr lang="zh-CN" altLang="en-US" sz="1600">
                         <a:sym typeface="+mn-ea"/>
                       </a:endParaRPr>
                     </a:p>
@@ -4189,7 +4190,7 @@
                       <a:pPr>
                         <a:buNone/>
                       </a:pPr>
-                      <a:endParaRPr lang="zh-CN" altLang="en-US" sz="1800"/>
+                      <a:endParaRPr lang="zh-CN" altLang="en-US" sz="1600"/>
                     </a:p>
                   </a:txBody>
                   <a:tcPr/>
@@ -4202,10 +4203,10 @@
                         <a:buNone/>
                       </a:pPr>
                       <a:r>
-                        <a:rPr lang="zh-CN" altLang="en-US" sz="1800"/>
+                        <a:rPr lang="zh-CN" altLang="en-US" sz="1600"/>
                         <a:t>滨海湾智慧灯杆</a:t>
                       </a:r>
-                      <a:endParaRPr lang="zh-CN" altLang="en-US" sz="1800"/>
+                      <a:endParaRPr lang="zh-CN" altLang="en-US" sz="1600"/>
                     </a:p>
                   </a:txBody>
                   <a:tcPr/>
@@ -4217,7 +4218,7 @@
                       <a:pPr>
                         <a:buNone/>
                       </a:pPr>
-                      <a:endParaRPr lang="zh-CN" altLang="en-US" sz="1800"/>
+                      <a:endParaRPr lang="zh-CN" altLang="en-US" sz="1600"/>
                     </a:p>
                   </a:txBody>
                   <a:tcPr/>
@@ -4243,8 +4244,8 @@
 
 <file path=ppt/tags/tag2.xml><?xml version="1.0" encoding="utf-8"?>
 <p:tagLst xmlns:p="http://schemas.openxmlformats.org/presentationml/2006/main">
-  <p:tag name="TABLE_ENDDRAG_ORIGIN_RECT" val="838*289"/>
-  <p:tag name="TABLE_ENDDRAG_RECT" val="66*143*838*289"/>
+  <p:tag name="TABLE_ENDDRAG_ORIGIN_RECT" val="842*338"/>
+  <p:tag name="TABLE_ENDDRAG_RECT" val="66*143*842*338"/>
 </p:tagLst>
 </file>
 
